--- a/Start.pptx
+++ b/Start.pptx
@@ -265,7 +265,7 @@
           <a:p>
             <a:fld id="{EB9EE409-306F-456A-AEE9-92A13D143AD6}" type="datetimeFigureOut">
               <a:rPr lang="en-US" smtClean="0"/>
-              <a:t>5/20/2026</a:t>
+              <a:t>10/7/2026</a:t>
             </a:fld>
             <a:endParaRPr lang="en-US"/>
           </a:p>
@@ -463,7 +463,7 @@
           <a:p>
             <a:fld id="{EB9EE409-306F-456A-AEE9-92A13D143AD6}" type="datetimeFigureOut">
               <a:rPr lang="en-US" smtClean="0"/>
-              <a:t>5/20/2026</a:t>
+              <a:t>10/7/2026</a:t>
             </a:fld>
             <a:endParaRPr lang="en-US"/>
           </a:p>
@@ -671,7 +671,7 @@
           <a:p>
             <a:fld id="{EB9EE409-306F-456A-AEE9-92A13D143AD6}" type="datetimeFigureOut">
               <a:rPr lang="en-US" smtClean="0"/>
-              <a:t>5/20/2026</a:t>
+              <a:t>10/7/2026</a:t>
             </a:fld>
             <a:endParaRPr lang="en-US"/>
           </a:p>
@@ -869,7 +869,7 @@
           <a:p>
             <a:fld id="{EB9EE409-306F-456A-AEE9-92A13D143AD6}" type="datetimeFigureOut">
               <a:rPr lang="en-US" smtClean="0"/>
-              <a:t>5/20/2026</a:t>
+              <a:t>10/7/2026</a:t>
             </a:fld>
             <a:endParaRPr lang="en-US"/>
           </a:p>
@@ -1144,7 +1144,7 @@
           <a:p>
             <a:fld id="{EB9EE409-306F-456A-AEE9-92A13D143AD6}" type="datetimeFigureOut">
               <a:rPr lang="en-US" smtClean="0"/>
-              <a:t>5/20/2026</a:t>
+              <a:t>10/7/2026</a:t>
             </a:fld>
             <a:endParaRPr lang="en-US"/>
           </a:p>
@@ -1409,7 +1409,7 @@
           <a:p>
             <a:fld id="{EB9EE409-306F-456A-AEE9-92A13D143AD6}" type="datetimeFigureOut">
               <a:rPr lang="en-US" smtClean="0"/>
-              <a:t>5/20/2026</a:t>
+              <a:t>10/7/2026</a:t>
             </a:fld>
             <a:endParaRPr lang="en-US"/>
           </a:p>
@@ -1821,7 +1821,7 @@
           <a:p>
             <a:fld id="{EB9EE409-306F-456A-AEE9-92A13D143AD6}" type="datetimeFigureOut">
               <a:rPr lang="en-US" smtClean="0"/>
-              <a:t>5/20/2026</a:t>
+              <a:t>10/7/2026</a:t>
             </a:fld>
             <a:endParaRPr lang="en-US"/>
           </a:p>
@@ -1962,7 +1962,7 @@
           <a:p>
             <a:fld id="{EB9EE409-306F-456A-AEE9-92A13D143AD6}" type="datetimeFigureOut">
               <a:rPr lang="en-US" smtClean="0"/>
-              <a:t>5/20/2026</a:t>
+              <a:t>10/7/2026</a:t>
             </a:fld>
             <a:endParaRPr lang="en-US"/>
           </a:p>
@@ -2075,7 +2075,7 @@
           <a:p>
             <a:fld id="{EB9EE409-306F-456A-AEE9-92A13D143AD6}" type="datetimeFigureOut">
               <a:rPr lang="en-US" smtClean="0"/>
-              <a:t>5/20/2026</a:t>
+              <a:t>10/7/2026</a:t>
             </a:fld>
             <a:endParaRPr lang="en-US"/>
           </a:p>
@@ -2386,7 +2386,7 @@
           <a:p>
             <a:fld id="{EB9EE409-306F-456A-AEE9-92A13D143AD6}" type="datetimeFigureOut">
               <a:rPr lang="en-US" smtClean="0"/>
-              <a:t>5/20/2026</a:t>
+              <a:t>10/7/2026</a:t>
             </a:fld>
             <a:endParaRPr lang="en-US"/>
           </a:p>
@@ -2674,7 +2674,7 @@
           <a:p>
             <a:fld id="{EB9EE409-306F-456A-AEE9-92A13D143AD6}" type="datetimeFigureOut">
               <a:rPr lang="en-US" smtClean="0"/>
-              <a:t>5/20/2026</a:t>
+              <a:t>10/7/2026</a:t>
             </a:fld>
             <a:endParaRPr lang="en-US"/>
           </a:p>
@@ -2915,7 +2915,7 @@
           <a:p>
             <a:fld id="{EB9EE409-306F-456A-AEE9-92A13D143AD6}" type="datetimeFigureOut">
               <a:rPr lang="en-US" smtClean="0"/>
-              <a:t>5/20/2026</a:t>
+              <a:t>10/7/2026</a:t>
             </a:fld>
             <a:endParaRPr lang="en-US"/>
           </a:p>
@@ -4197,7 +4197,7 @@
             </a:pPr>
             <a:r>
               <a:rPr lang="en-US" dirty="0"/>
-              <a:t>git commit -m “</a:t>
+              <a:t>git commit -m "</a:t>
             </a:r>
             <a:r>
               <a:rPr lang="en-US" dirty="0" err="1"/>

--- a/Start.pptx
+++ b/Start.pptx
@@ -265,7 +265,7 @@
           <a:p>
             <a:fld id="{EB9EE409-306F-456A-AEE9-92A13D143AD6}" type="datetimeFigureOut">
               <a:rPr lang="en-US" smtClean="0"/>
-              <a:t>10/7/2026</a:t>
+              <a:t>10/8/2026</a:t>
             </a:fld>
             <a:endParaRPr lang="en-US"/>
           </a:p>
@@ -463,7 +463,7 @@
           <a:p>
             <a:fld id="{EB9EE409-306F-456A-AEE9-92A13D143AD6}" type="datetimeFigureOut">
               <a:rPr lang="en-US" smtClean="0"/>
-              <a:t>10/7/2026</a:t>
+              <a:t>10/8/2026</a:t>
             </a:fld>
             <a:endParaRPr lang="en-US"/>
           </a:p>
@@ -671,7 +671,7 @@
           <a:p>
             <a:fld id="{EB9EE409-306F-456A-AEE9-92A13D143AD6}" type="datetimeFigureOut">
               <a:rPr lang="en-US" smtClean="0"/>
-              <a:t>10/7/2026</a:t>
+              <a:t>10/8/2026</a:t>
             </a:fld>
             <a:endParaRPr lang="en-US"/>
           </a:p>
@@ -869,7 +869,7 @@
           <a:p>
             <a:fld id="{EB9EE409-306F-456A-AEE9-92A13D143AD6}" type="datetimeFigureOut">
               <a:rPr lang="en-US" smtClean="0"/>
-              <a:t>10/7/2026</a:t>
+              <a:t>10/8/2026</a:t>
             </a:fld>
             <a:endParaRPr lang="en-US"/>
           </a:p>
@@ -1144,7 +1144,7 @@
           <a:p>
             <a:fld id="{EB9EE409-306F-456A-AEE9-92A13D143AD6}" type="datetimeFigureOut">
               <a:rPr lang="en-US" smtClean="0"/>
-              <a:t>10/7/2026</a:t>
+              <a:t>10/8/2026</a:t>
             </a:fld>
             <a:endParaRPr lang="en-US"/>
           </a:p>
@@ -1409,7 +1409,7 @@
           <a:p>
             <a:fld id="{EB9EE409-306F-456A-AEE9-92A13D143AD6}" type="datetimeFigureOut">
               <a:rPr lang="en-US" smtClean="0"/>
-              <a:t>10/7/2026</a:t>
+              <a:t>10/8/2026</a:t>
             </a:fld>
             <a:endParaRPr lang="en-US"/>
           </a:p>
@@ -1821,7 +1821,7 @@
           <a:p>
             <a:fld id="{EB9EE409-306F-456A-AEE9-92A13D143AD6}" type="datetimeFigureOut">
               <a:rPr lang="en-US" smtClean="0"/>
-              <a:t>10/7/2026</a:t>
+              <a:t>10/8/2026</a:t>
             </a:fld>
             <a:endParaRPr lang="en-US"/>
           </a:p>
@@ -1962,7 +1962,7 @@
           <a:p>
             <a:fld id="{EB9EE409-306F-456A-AEE9-92A13D143AD6}" type="datetimeFigureOut">
               <a:rPr lang="en-US" smtClean="0"/>
-              <a:t>10/7/2026</a:t>
+              <a:t>10/8/2026</a:t>
             </a:fld>
             <a:endParaRPr lang="en-US"/>
           </a:p>
@@ -2075,7 +2075,7 @@
           <a:p>
             <a:fld id="{EB9EE409-306F-456A-AEE9-92A13D143AD6}" type="datetimeFigureOut">
               <a:rPr lang="en-US" smtClean="0"/>
-              <a:t>10/7/2026</a:t>
+              <a:t>10/8/2026</a:t>
             </a:fld>
             <a:endParaRPr lang="en-US"/>
           </a:p>
@@ -2386,7 +2386,7 @@
           <a:p>
             <a:fld id="{EB9EE409-306F-456A-AEE9-92A13D143AD6}" type="datetimeFigureOut">
               <a:rPr lang="en-US" smtClean="0"/>
-              <a:t>10/7/2026</a:t>
+              <a:t>10/8/2026</a:t>
             </a:fld>
             <a:endParaRPr lang="en-US"/>
           </a:p>
@@ -2674,7 +2674,7 @@
           <a:p>
             <a:fld id="{EB9EE409-306F-456A-AEE9-92A13D143AD6}" type="datetimeFigureOut">
               <a:rPr lang="en-US" smtClean="0"/>
-              <a:t>10/7/2026</a:t>
+              <a:t>10/8/2026</a:t>
             </a:fld>
             <a:endParaRPr lang="en-US"/>
           </a:p>
@@ -2915,7 +2915,7 @@
           <a:p>
             <a:fld id="{EB9EE409-306F-456A-AEE9-92A13D143AD6}" type="datetimeFigureOut">
               <a:rPr lang="en-US" smtClean="0"/>
-              <a:t>10/7/2026</a:t>
+              <a:t>10/8/2026</a:t>
             </a:fld>
             <a:endParaRPr lang="en-US"/>
           </a:p>
@@ -3355,10 +3355,6 @@
           </a:bodyPr>
           <a:lstStyle/>
           <a:p>
-            <a:r>
-              <a:rPr lang="en-US" dirty="0"/>
-              <a:t>Basics</a:t>
-            </a:r>
             <a:br>
               <a:rPr lang="en-US" dirty="0"/>
             </a:br>
@@ -4331,7 +4327,7 @@
           <a:p>
             <a:r>
               <a:rPr lang="en-US" dirty="0"/>
-              <a:t>Web A-Frame library</a:t>
+              <a:t>A-Frame </a:t>
             </a:r>
           </a:p>
         </p:txBody>
